--- a/session4/exam-strategy/q3/q3_exam_strategy.pptx
+++ b/session4/exam-strategy/q3/q3_exam_strategy.pptx
@@ -3188,8 +3188,8 @@
         </p:nvSpPr>
         <p:spPr>
           <a:xfrm>
-            <a:off x="274320" y="685800"/>
-            <a:ext cx="6400800" cy="1645920"/>
+            <a:off x="274320" y="640080"/>
+            <a:ext cx="6583680" cy="1280160"/>
           </a:xfrm>
           <a:prstGeom prst="rect">
             <a:avLst/>
@@ -3197,13 +3197,13 @@
           <a:noFill/>
         </p:spPr>
         <p:txBody>
-          <a:bodyPr wrap="square">
+          <a:bodyPr wrap="square" tIns="0" bIns="0">
             <a:spAutoFit/>
           </a:bodyPr>
           <a:lstStyle/>
           <a:p>
             <a:pPr>
-              <a:defRPr sz="1100">
+              <a:defRPr sz="900">
                 <a:solidFill>
                   <a:srgbClr val="FFFFFF"/>
                 </a:solidFill>
@@ -3211,7 +3211,7 @@
               </a:defRPr>
             </a:pPr>
             <a:r>
-              <a:t>A company is working on a project to enhance its serverless application development process. The company hosts applications on AWS Lambda. The development team regularly updates the Lambda code and wants to use stable code in production. Which combination of steps should the development team take to configure Lambda functions to meet both development and production requirements? (Select TWO.)</a:t>
+              <a:t>A company is working on a project to enhance its serverless application development process. The company hosts applications on AWS Lambda. The development team regularly updates the Lambda code and wants to use stable code in production. Which combination of steps should the development team take to configure Lambda functions to meet both develo...</a:t>
             </a:r>
           </a:p>
         </p:txBody>
@@ -3224,8 +3224,8 @@
         </p:nvSpPr>
         <p:spPr>
           <a:xfrm>
-            <a:off x="365760" y="2377440"/>
-            <a:ext cx="274320" cy="274320"/>
+            <a:off x="274320" y="2057400"/>
+            <a:ext cx="201168" cy="201168"/>
           </a:xfrm>
           <a:prstGeom prst="ellipse">
             <a:avLst/>
@@ -3256,7 +3256,7 @@
           <a:lstStyle/>
           <a:p>
             <a:pPr algn="ctr">
-              <a:defRPr sz="900" b="1">
+              <a:defRPr sz="700" b="1">
                 <a:solidFill>
                   <a:srgbClr val="FFFFFF"/>
                 </a:solidFill>
@@ -3276,8 +3276,8 @@
         </p:nvSpPr>
         <p:spPr>
           <a:xfrm>
-            <a:off x="777240" y="2377440"/>
-            <a:ext cx="5943600" cy="411480"/>
+            <a:off x="548640" y="2011680"/>
+            <a:ext cx="6400800" cy="585215"/>
           </a:xfrm>
           <a:prstGeom prst="rect">
             <a:avLst/>
@@ -3285,13 +3285,13 @@
           <a:noFill/>
         </p:spPr>
         <p:txBody>
-          <a:bodyPr wrap="square">
+          <a:bodyPr wrap="square" tIns="25400" bIns="0" lIns="0">
             <a:spAutoFit/>
           </a:bodyPr>
           <a:lstStyle/>
           <a:p>
             <a:pPr>
-              <a:defRPr sz="1000">
+              <a:defRPr sz="800">
                 <a:solidFill>
                   <a:srgbClr val="CCCCCC"/>
                 </a:solidFill>
@@ -3299,7 +3299,7 @@
               </a:defRPr>
             </a:pPr>
             <a:r>
-              <a:t>Using a Lambda layer, you can access additional code and content. It is not suitable for code updates.</a:t>
+              <a:t>Using a Lambda layer, you can access additional code and content. It is not suitable for code update</a:t>
             </a:r>
           </a:p>
         </p:txBody>
@@ -3312,8 +3312,8 @@
         </p:nvSpPr>
         <p:spPr>
           <a:xfrm>
-            <a:off x="365760" y="2834640"/>
-            <a:ext cx="274320" cy="274320"/>
+            <a:off x="274320" y="2660904"/>
+            <a:ext cx="201168" cy="201168"/>
           </a:xfrm>
           <a:prstGeom prst="ellipse">
             <a:avLst/>
@@ -3344,7 +3344,7 @@
           <a:lstStyle/>
           <a:p>
             <a:pPr algn="ctr">
-              <a:defRPr sz="900" b="1">
+              <a:defRPr sz="700" b="1">
                 <a:solidFill>
                   <a:srgbClr val="FFFFFF"/>
                 </a:solidFill>
@@ -3364,8 +3364,8 @@
         </p:nvSpPr>
         <p:spPr>
           <a:xfrm>
-            <a:off x="777240" y="2834640"/>
-            <a:ext cx="5943600" cy="411480"/>
+            <a:off x="548640" y="2615184"/>
+            <a:ext cx="6400800" cy="585215"/>
           </a:xfrm>
           <a:prstGeom prst="rect">
             <a:avLst/>
@@ -3373,13 +3373,13 @@
           <a:noFill/>
         </p:spPr>
         <p:txBody>
-          <a:bodyPr wrap="square">
+          <a:bodyPr wrap="square" tIns="25400" bIns="0" lIns="0">
             <a:spAutoFit/>
           </a:bodyPr>
           <a:lstStyle/>
           <a:p>
             <a:pPr>
-              <a:defRPr sz="1000">
+              <a:defRPr sz="800">
                 <a:solidFill>
                   <a:srgbClr val="CCCCCC"/>
                 </a:solidFill>
@@ -3387,7 +3387,7 @@
               </a:defRPr>
             </a:pPr>
             <a:r>
-              <a:t>Lambda function versions are designed to manage deployment of functions. They can be used for code changes, without affe</a:t>
+              <a:t>Lambda function versions are designed to manage deployment of functions. They can be used for code c</a:t>
             </a:r>
           </a:p>
         </p:txBody>
@@ -3400,8 +3400,8 @@
         </p:nvSpPr>
         <p:spPr>
           <a:xfrm>
-            <a:off x="365760" y="3291840"/>
-            <a:ext cx="274320" cy="274320"/>
+            <a:off x="274320" y="3264408"/>
+            <a:ext cx="201168" cy="201168"/>
           </a:xfrm>
           <a:prstGeom prst="ellipse">
             <a:avLst/>
@@ -3432,7 +3432,7 @@
           <a:lstStyle/>
           <a:p>
             <a:pPr algn="ctr">
-              <a:defRPr sz="900" b="1">
+              <a:defRPr sz="700" b="1">
                 <a:solidFill>
                   <a:srgbClr val="FFFFFF"/>
                 </a:solidFill>
@@ -3452,8 +3452,8 @@
         </p:nvSpPr>
         <p:spPr>
           <a:xfrm>
-            <a:off x="777240" y="3291840"/>
-            <a:ext cx="5943600" cy="411480"/>
+            <a:off x="548640" y="3218688"/>
+            <a:ext cx="6400800" cy="585215"/>
           </a:xfrm>
           <a:prstGeom prst="rect">
             <a:avLst/>
@@ -3461,13 +3461,13 @@
           <a:noFill/>
         </p:spPr>
         <p:txBody>
-          <a:bodyPr wrap="square">
+          <a:bodyPr wrap="square" tIns="25400" bIns="0" lIns="0">
             <a:spAutoFit/>
           </a:bodyPr>
           <a:lstStyle/>
           <a:p>
             <a:pPr>
-              <a:defRPr sz="1000">
+              <a:defRPr sz="800">
                 <a:solidFill>
                   <a:srgbClr val="CCCCCC"/>
                 </a:solidFill>
@@ -3475,7 +3475,7 @@
               </a:defRPr>
             </a:pPr>
             <a:r>
-              <a:t>Using a Lambda layer, you can access additional code and content. It is not suitable for code updates. Additionally, a L</a:t>
+              <a:t>Using a Lambda layer, you can access additional code and content. It is not suitable for code update</a:t>
             </a:r>
           </a:p>
         </p:txBody>
@@ -3488,8 +3488,8 @@
         </p:nvSpPr>
         <p:spPr>
           <a:xfrm>
-            <a:off x="365760" y="3749039"/>
-            <a:ext cx="274320" cy="274320"/>
+            <a:off x="274320" y="3867911"/>
+            <a:ext cx="201168" cy="201168"/>
           </a:xfrm>
           <a:prstGeom prst="ellipse">
             <a:avLst/>
@@ -3520,7 +3520,7 @@
           <a:lstStyle/>
           <a:p>
             <a:pPr algn="ctr">
-              <a:defRPr sz="900" b="1">
+              <a:defRPr sz="700" b="1">
                 <a:solidFill>
                   <a:srgbClr val="FFFFFF"/>
                 </a:solidFill>
@@ -3540,8 +3540,8 @@
         </p:nvSpPr>
         <p:spPr>
           <a:xfrm>
-            <a:off x="777240" y="3749039"/>
-            <a:ext cx="5943600" cy="411480"/>
+            <a:off x="548640" y="3822191"/>
+            <a:ext cx="6400800" cy="585215"/>
           </a:xfrm>
           <a:prstGeom prst="rect">
             <a:avLst/>
@@ -3549,13 +3549,13 @@
           <a:noFill/>
         </p:spPr>
         <p:txBody>
-          <a:bodyPr wrap="square">
+          <a:bodyPr wrap="square" tIns="25400" bIns="0" lIns="0">
             <a:spAutoFit/>
           </a:bodyPr>
           <a:lstStyle/>
           <a:p>
             <a:pPr>
-              <a:defRPr sz="1000">
+              <a:defRPr sz="800">
                 <a:solidFill>
                   <a:srgbClr val="CCCCCC"/>
                 </a:solidFill>
@@ -3563,7 +3563,7 @@
               </a:defRPr>
             </a:pPr>
             <a:r>
-              <a:t>By creating separate aliases for Production and Development, systems can initiate the correct alias as needed. A Lambda </a:t>
+              <a:t>By creating separate aliases for Production and Development, systems can initiate the correct alias </a:t>
             </a:r>
           </a:p>
         </p:txBody>
@@ -3576,8 +3576,8 @@
         </p:nvSpPr>
         <p:spPr>
           <a:xfrm>
-            <a:off x="365760" y="4206240"/>
-            <a:ext cx="274320" cy="274320"/>
+            <a:off x="274320" y="4471416"/>
+            <a:ext cx="201168" cy="201168"/>
           </a:xfrm>
           <a:prstGeom prst="ellipse">
             <a:avLst/>
@@ -3608,7 +3608,7 @@
           <a:lstStyle/>
           <a:p>
             <a:pPr algn="ctr">
-              <a:defRPr sz="900" b="1">
+              <a:defRPr sz="700" b="1">
                 <a:solidFill>
                   <a:srgbClr val="FFFFFF"/>
                 </a:solidFill>
@@ -3628,8 +3628,8 @@
         </p:nvSpPr>
         <p:spPr>
           <a:xfrm>
-            <a:off x="777240" y="4206240"/>
-            <a:ext cx="5943600" cy="411480"/>
+            <a:off x="548640" y="4425696"/>
+            <a:ext cx="6400800" cy="585215"/>
           </a:xfrm>
           <a:prstGeom prst="rect">
             <a:avLst/>
@@ -3637,13 +3637,13 @@
           <a:noFill/>
         </p:spPr>
         <p:txBody>
-          <a:bodyPr wrap="square">
+          <a:bodyPr wrap="square" tIns="25400" bIns="0" lIns="0">
             <a:spAutoFit/>
           </a:bodyPr>
           <a:lstStyle/>
           <a:p>
             <a:pPr>
-              <a:defRPr sz="1000">
+              <a:defRPr sz="800">
                 <a:solidFill>
                   <a:srgbClr val="CCCCCC"/>
                 </a:solidFill>
@@ -3651,7 +3651,7 @@
               </a:defRPr>
             </a:pPr>
             <a:r>
-              <a:t>A Lambda function alias can only point to an unqualified function ARN. LAMBDA_TASK_ROOT is a variable used by Lambda to </a:t>
+              <a:t>A Lambda function alias can only point to an unqualified function ARN. LAMBDA_TASK_ROOT is a variabl</a:t>
             </a:r>
           </a:p>
         </p:txBody>
@@ -3933,8 +3933,8 @@
         </p:blipFill>
         <p:spPr>
           <a:xfrm>
-            <a:off x="182880" y="914400"/>
-            <a:ext cx="3228638" cy="3840480"/>
+            <a:off x="182880" y="1232666"/>
+            <a:ext cx="5303520" cy="3203947"/>
           </a:xfrm>
           <a:prstGeom prst="rect">
             <a:avLst/>
@@ -4069,9 +4069,9 @@
           <a:p>
             <a:pPr>
               <a:spcAft>
-                <a:spcPts val="600"/>
+                <a:spcPts val="400"/>
               </a:spcAft>
-              <a:defRPr sz="900">
+              <a:defRPr sz="800">
                 <a:solidFill>
                   <a:srgbClr val="212121"/>
                 </a:solidFill>
@@ -4079,15 +4079,15 @@
               </a:defRPr>
             </a:pPr>
             <a:r>
-              <a:t>• Using a Lambda layer, you can access additional code and content.</a:t>
+              <a:t>• Using a Lambda layer, you can access additional code and content</a:t>
             </a:r>
           </a:p>
           <a:p>
             <a:pPr>
               <a:spcAft>
-                <a:spcPts val="600"/>
+                <a:spcPts val="400"/>
               </a:spcAft>
-              <a:defRPr sz="900">
+              <a:defRPr sz="800">
                 <a:solidFill>
                   <a:srgbClr val="212121"/>
                 </a:solidFill>
@@ -4095,7 +4095,7 @@
               </a:defRPr>
             </a:pPr>
             <a:r>
-              <a:t>• It is not suitable for code updates.</a:t>
+              <a:t>• It is not suitable for code updates</a:t>
             </a:r>
           </a:p>
         </p:txBody>
@@ -4275,7 +4275,7 @@
         <p:spPr>
           <a:xfrm>
             <a:off x="182880" y="914400"/>
-            <a:ext cx="3115683" cy="3840480"/>
+            <a:ext cx="3682447" cy="3840480"/>
           </a:xfrm>
           <a:prstGeom prst="rect">
             <a:avLst/>
@@ -4410,9 +4410,9 @@
           <a:p>
             <a:pPr>
               <a:spcAft>
-                <a:spcPts val="600"/>
+                <a:spcPts val="400"/>
               </a:spcAft>
-              <a:defRPr sz="900">
+              <a:defRPr sz="800">
                 <a:solidFill>
                   <a:srgbClr val="212121"/>
                 </a:solidFill>
@@ -4420,15 +4420,15 @@
               </a:defRPr>
             </a:pPr>
             <a:r>
-              <a:t>• Lambda function versions are designed to manage deployment of functions.</a:t>
+              <a:t>• Lambda function versions are designed to manage deployment of functions</a:t>
             </a:r>
           </a:p>
           <a:p>
             <a:pPr>
               <a:spcAft>
-                <a:spcPts val="600"/>
+                <a:spcPts val="400"/>
               </a:spcAft>
-              <a:defRPr sz="900">
+              <a:defRPr sz="800">
                 <a:solidFill>
                   <a:srgbClr val="212121"/>
                 </a:solidFill>
@@ -4436,7 +4436,23 @@
               </a:defRPr>
             </a:pPr>
             <a:r>
-              <a:t>• They can be used for code changes, without affecting the stable production version of the code.</a:t>
+              <a:t>• They can be used for code changes</a:t>
+            </a:r>
+          </a:p>
+          <a:p>
+            <a:pPr>
+              <a:spcAft>
+                <a:spcPts val="400"/>
+              </a:spcAft>
+              <a:defRPr sz="800">
+                <a:solidFill>
+                  <a:srgbClr val="212121"/>
+                </a:solidFill>
+                <a:latin typeface="Segoe UI"/>
+              </a:defRPr>
+            </a:pPr>
+            <a:r>
+              <a:t>• Without affecting the stable production version of the code</a:t>
             </a:r>
           </a:p>
         </p:txBody>
@@ -4615,8 +4631,8 @@
         </p:blipFill>
         <p:spPr>
           <a:xfrm>
-            <a:off x="182880" y="914400"/>
-            <a:ext cx="3228638" cy="3840480"/>
+            <a:off x="182880" y="1287963"/>
+            <a:ext cx="5303520" cy="3093353"/>
           </a:xfrm>
           <a:prstGeom prst="rect">
             <a:avLst/>
@@ -4751,9 +4767,9 @@
           <a:p>
             <a:pPr>
               <a:spcAft>
-                <a:spcPts val="600"/>
+                <a:spcPts val="400"/>
               </a:spcAft>
-              <a:defRPr sz="900">
+              <a:defRPr sz="800">
                 <a:solidFill>
                   <a:srgbClr val="212121"/>
                 </a:solidFill>
@@ -4761,15 +4777,15 @@
               </a:defRPr>
             </a:pPr>
             <a:r>
-              <a:t>• Using a Lambda layer, you can access additional code and content.</a:t>
+              <a:t>• Using a Lambda layer, you can access additional code and content</a:t>
             </a:r>
           </a:p>
           <a:p>
             <a:pPr>
               <a:spcAft>
-                <a:spcPts val="600"/>
+                <a:spcPts val="400"/>
               </a:spcAft>
-              <a:defRPr sz="900">
+              <a:defRPr sz="800">
                 <a:solidFill>
                   <a:srgbClr val="212121"/>
                 </a:solidFill>
@@ -4777,15 +4793,15 @@
               </a:defRPr>
             </a:pPr>
             <a:r>
-              <a:t>• It is not suitable for code updates.</a:t>
+              <a:t>• It is not suitable for code updates</a:t>
             </a:r>
           </a:p>
           <a:p>
             <a:pPr>
               <a:spcAft>
-                <a:spcPts val="600"/>
+                <a:spcPts val="400"/>
               </a:spcAft>
-              <a:defRPr sz="900">
+              <a:defRPr sz="800">
                 <a:solidFill>
                   <a:srgbClr val="212121"/>
                 </a:solidFill>
@@ -4793,7 +4809,7 @@
               </a:defRPr>
             </a:pPr>
             <a:r>
-              <a:t>• Additionally, a Lambda function alias points to a Lambda function version.</a:t>
+              <a:t>• Additionally, a Lambda function alias points to a Lambda function version</a:t>
             </a:r>
           </a:p>
         </p:txBody>
@@ -4973,7 +4989,7 @@
         <p:spPr>
           <a:xfrm>
             <a:off x="182880" y="914400"/>
-            <a:ext cx="3115683" cy="3840480"/>
+            <a:ext cx="3539324" cy="3840480"/>
           </a:xfrm>
           <a:prstGeom prst="rect">
             <a:avLst/>
@@ -5108,9 +5124,9 @@
           <a:p>
             <a:pPr>
               <a:spcAft>
-                <a:spcPts val="600"/>
+                <a:spcPts val="400"/>
               </a:spcAft>
-              <a:defRPr sz="900">
+              <a:defRPr sz="800">
                 <a:solidFill>
                   <a:srgbClr val="212121"/>
                 </a:solidFill>
@@ -5118,15 +5134,15 @@
               </a:defRPr>
             </a:pPr>
             <a:r>
-              <a:t>• By creating separate aliases for Production and Development, systems can initiate the correct alias as needed.</a:t>
+              <a:t>• By creating separate aliases for Production and Development</a:t>
             </a:r>
           </a:p>
           <a:p>
             <a:pPr>
               <a:spcAft>
-                <a:spcPts val="600"/>
+                <a:spcPts val="400"/>
               </a:spcAft>
-              <a:defRPr sz="900">
+              <a:defRPr sz="800">
                 <a:solidFill>
                   <a:srgbClr val="212121"/>
                 </a:solidFill>
@@ -5134,15 +5150,15 @@
               </a:defRPr>
             </a:pPr>
             <a:r>
-              <a:t>• A Lambda function alias can be used to point to a specific Lambda function version.</a:t>
+              <a:t>• Systems can initiate the correct alias as needed</a:t>
             </a:r>
           </a:p>
           <a:p>
             <a:pPr>
               <a:spcAft>
-                <a:spcPts val="600"/>
+                <a:spcPts val="400"/>
               </a:spcAft>
-              <a:defRPr sz="900">
+              <a:defRPr sz="800">
                 <a:solidFill>
                   <a:srgbClr val="212121"/>
                 </a:solidFill>
@@ -5150,15 +5166,15 @@
               </a:defRPr>
             </a:pPr>
             <a:r>
-              <a:t>• Using the functionality to update an alias and its linked version, the development team can update the required version as needed.</a:t>
+              <a:t>• A Lambda function alias can be used to point to a specific Lambda function version</a:t>
             </a:r>
           </a:p>
           <a:p>
             <a:pPr>
               <a:spcAft>
-                <a:spcPts val="600"/>
+                <a:spcPts val="400"/>
               </a:spcAft>
-              <a:defRPr sz="900">
+              <a:defRPr sz="800">
                 <a:solidFill>
                   <a:srgbClr val="212121"/>
                 </a:solidFill>
@@ -5166,7 +5182,39 @@
               </a:defRPr>
             </a:pPr>
             <a:r>
-              <a:t>• The $LATEST version is the newest published version.</a:t>
+              <a:t>• Using the functionality to update an alias and its linked version</a:t>
+            </a:r>
+          </a:p>
+          <a:p>
+            <a:pPr>
+              <a:spcAft>
+                <a:spcPts val="400"/>
+              </a:spcAft>
+              <a:defRPr sz="800">
+                <a:solidFill>
+                  <a:srgbClr val="212121"/>
+                </a:solidFill>
+                <a:latin typeface="Segoe UI"/>
+              </a:defRPr>
+            </a:pPr>
+            <a:r>
+              <a:t>• The development team can update the required version as needed</a:t>
+            </a:r>
+          </a:p>
+          <a:p>
+            <a:pPr>
+              <a:spcAft>
+                <a:spcPts val="400"/>
+              </a:spcAft>
+              <a:defRPr sz="800">
+                <a:solidFill>
+                  <a:srgbClr val="212121"/>
+                </a:solidFill>
+                <a:latin typeface="Segoe UI"/>
+              </a:defRPr>
+            </a:pPr>
+            <a:r>
+              <a:t>• The $LATEST version is the newest published version</a:t>
             </a:r>
           </a:p>
         </p:txBody>
@@ -5345,8 +5393,8 @@
         </p:blipFill>
         <p:spPr>
           <a:xfrm>
-            <a:off x="182880" y="914400"/>
-            <a:ext cx="3219225" cy="3840480"/>
+            <a:off x="182880" y="1760705"/>
+            <a:ext cx="5303520" cy="2147869"/>
           </a:xfrm>
           <a:prstGeom prst="rect">
             <a:avLst/>
@@ -5481,9 +5529,9 @@
           <a:p>
             <a:pPr>
               <a:spcAft>
-                <a:spcPts val="600"/>
+                <a:spcPts val="400"/>
               </a:spcAft>
-              <a:defRPr sz="900">
+              <a:defRPr sz="800">
                 <a:solidFill>
                   <a:srgbClr val="212121"/>
                 </a:solidFill>
@@ -5491,15 +5539,15 @@
               </a:defRPr>
             </a:pPr>
             <a:r>
-              <a:t>• A Lambda function alias can only point to an unqualified function ARN.</a:t>
+              <a:t>• A Lambda function alias can only point to an unqualified function ARN</a:t>
             </a:r>
           </a:p>
           <a:p>
             <a:pPr>
               <a:spcAft>
-                <a:spcPts val="600"/>
+                <a:spcPts val="400"/>
               </a:spcAft>
-              <a:defRPr sz="900">
+              <a:defRPr sz="800">
                 <a:solidFill>
                   <a:srgbClr val="212121"/>
                 </a:solidFill>
@@ -5507,15 +5555,15 @@
               </a:defRPr>
             </a:pPr>
             <a:r>
-              <a:t>• LAMBDA_TASK_ROOT is a variable used by Lambda to record the path to the code.</a:t>
+              <a:t>• LAMBDA_TASK_ROOT is a variable used by Lambda to record the path to the code</a:t>
             </a:r>
           </a:p>
           <a:p>
             <a:pPr>
               <a:spcAft>
-                <a:spcPts val="600"/>
+                <a:spcPts val="400"/>
               </a:spcAft>
-              <a:defRPr sz="900">
+              <a:defRPr sz="800">
                 <a:solidFill>
                   <a:srgbClr val="212121"/>
                 </a:solidFill>
@@ -5523,7 +5571,7 @@
               </a:defRPr>
             </a:pPr>
             <a:r>
-              <a:t>• However, it cannot be used in the way the response describes.</a:t>
+              <a:t>• However, it cannot be used in the way the response describes</a:t>
             </a:r>
           </a:p>
         </p:txBody>

--- a/session4/exam-strategy/q3/q3_exam_strategy.pptx
+++ b/session4/exam-strategy/q3/q3_exam_strategy.pptx
@@ -3188,8 +3188,8 @@
         </p:nvSpPr>
         <p:spPr>
           <a:xfrm>
-            <a:off x="274320" y="640080"/>
-            <a:ext cx="6583680" cy="1280160"/>
+            <a:off x="274320" y="685800"/>
+            <a:ext cx="6400800" cy="1645920"/>
           </a:xfrm>
           <a:prstGeom prst="rect">
             <a:avLst/>
@@ -3197,13 +3197,13 @@
           <a:noFill/>
         </p:spPr>
         <p:txBody>
-          <a:bodyPr wrap="square" tIns="0" bIns="0">
+          <a:bodyPr wrap="square">
             <a:spAutoFit/>
           </a:bodyPr>
           <a:lstStyle/>
           <a:p>
             <a:pPr>
-              <a:defRPr sz="900">
+              <a:defRPr sz="1100">
                 <a:solidFill>
                   <a:srgbClr val="FFFFFF"/>
                 </a:solidFill>
@@ -3211,7 +3211,7 @@
               </a:defRPr>
             </a:pPr>
             <a:r>
-              <a:t>A company is working on a project to enhance its serverless application development process. The company hosts applications on AWS Lambda. The development team regularly updates the Lambda code and wants to use stable code in production. Which combination of steps should the development team take to configure Lambda functions to meet both develo...</a:t>
+              <a:t>A company is working on a project to enhance its serverless application development process. The company hosts applications on AWS Lambda. The development team regularly updates the Lambda code and wants to use stable code in production. Which combination of steps should the development team take to configure Lambda functions to meet both development and production requirements? (Select TWO.)</a:t>
             </a:r>
           </a:p>
         </p:txBody>
@@ -3224,8 +3224,8 @@
         </p:nvSpPr>
         <p:spPr>
           <a:xfrm>
-            <a:off x="274320" y="2057400"/>
-            <a:ext cx="201168" cy="201168"/>
+            <a:off x="365760" y="2377440"/>
+            <a:ext cx="274320" cy="274320"/>
           </a:xfrm>
           <a:prstGeom prst="ellipse">
             <a:avLst/>
@@ -3256,7 +3256,7 @@
           <a:lstStyle/>
           <a:p>
             <a:pPr algn="ctr">
-              <a:defRPr sz="700" b="1">
+              <a:defRPr sz="900" b="1">
                 <a:solidFill>
                   <a:srgbClr val="FFFFFF"/>
                 </a:solidFill>
@@ -3276,8 +3276,8 @@
         </p:nvSpPr>
         <p:spPr>
           <a:xfrm>
-            <a:off x="548640" y="2011680"/>
-            <a:ext cx="6400800" cy="585215"/>
+            <a:off x="777240" y="2377440"/>
+            <a:ext cx="5943600" cy="411480"/>
           </a:xfrm>
           <a:prstGeom prst="rect">
             <a:avLst/>
@@ -3285,13 +3285,13 @@
           <a:noFill/>
         </p:spPr>
         <p:txBody>
-          <a:bodyPr wrap="square" tIns="25400" bIns="0" lIns="0">
+          <a:bodyPr wrap="square">
             <a:spAutoFit/>
           </a:bodyPr>
           <a:lstStyle/>
           <a:p>
             <a:pPr>
-              <a:defRPr sz="800">
+              <a:defRPr sz="1000">
                 <a:solidFill>
                   <a:srgbClr val="CCCCCC"/>
                 </a:solidFill>
@@ -3299,7 +3299,7 @@
               </a:defRPr>
             </a:pPr>
             <a:r>
-              <a:t>Using a Lambda layer, you can access additional code and content. It is not suitable for code update</a:t>
+              <a:t>Using a Lambda layer, you can access additional code and content. It is not suitable for code updates.</a:t>
             </a:r>
           </a:p>
         </p:txBody>
@@ -3312,8 +3312,8 @@
         </p:nvSpPr>
         <p:spPr>
           <a:xfrm>
-            <a:off x="274320" y="2660904"/>
-            <a:ext cx="201168" cy="201168"/>
+            <a:off x="365760" y="2834640"/>
+            <a:ext cx="274320" cy="274320"/>
           </a:xfrm>
           <a:prstGeom prst="ellipse">
             <a:avLst/>
@@ -3344,7 +3344,7 @@
           <a:lstStyle/>
           <a:p>
             <a:pPr algn="ctr">
-              <a:defRPr sz="700" b="1">
+              <a:defRPr sz="900" b="1">
                 <a:solidFill>
                   <a:srgbClr val="FFFFFF"/>
                 </a:solidFill>
@@ -3364,8 +3364,8 @@
         </p:nvSpPr>
         <p:spPr>
           <a:xfrm>
-            <a:off x="548640" y="2615184"/>
-            <a:ext cx="6400800" cy="585215"/>
+            <a:off x="777240" y="2834640"/>
+            <a:ext cx="5943600" cy="411480"/>
           </a:xfrm>
           <a:prstGeom prst="rect">
             <a:avLst/>
@@ -3373,13 +3373,13 @@
           <a:noFill/>
         </p:spPr>
         <p:txBody>
-          <a:bodyPr wrap="square" tIns="25400" bIns="0" lIns="0">
+          <a:bodyPr wrap="square">
             <a:spAutoFit/>
           </a:bodyPr>
           <a:lstStyle/>
           <a:p>
             <a:pPr>
-              <a:defRPr sz="800">
+              <a:defRPr sz="1000">
                 <a:solidFill>
                   <a:srgbClr val="CCCCCC"/>
                 </a:solidFill>
@@ -3387,7 +3387,7 @@
               </a:defRPr>
             </a:pPr>
             <a:r>
-              <a:t>Lambda function versions are designed to manage deployment of functions. They can be used for code c</a:t>
+              <a:t>Lambda function versions are designed to manage deployment of functions. They can be used for code changes, without affe</a:t>
             </a:r>
           </a:p>
         </p:txBody>
@@ -3400,8 +3400,8 @@
         </p:nvSpPr>
         <p:spPr>
           <a:xfrm>
-            <a:off x="274320" y="3264408"/>
-            <a:ext cx="201168" cy="201168"/>
+            <a:off x="365760" y="3291840"/>
+            <a:ext cx="274320" cy="274320"/>
           </a:xfrm>
           <a:prstGeom prst="ellipse">
             <a:avLst/>
@@ -3432,7 +3432,7 @@
           <a:lstStyle/>
           <a:p>
             <a:pPr algn="ctr">
-              <a:defRPr sz="700" b="1">
+              <a:defRPr sz="900" b="1">
                 <a:solidFill>
                   <a:srgbClr val="FFFFFF"/>
                 </a:solidFill>
@@ -3452,8 +3452,8 @@
         </p:nvSpPr>
         <p:spPr>
           <a:xfrm>
-            <a:off x="548640" y="3218688"/>
-            <a:ext cx="6400800" cy="585215"/>
+            <a:off x="777240" y="3291840"/>
+            <a:ext cx="5943600" cy="411480"/>
           </a:xfrm>
           <a:prstGeom prst="rect">
             <a:avLst/>
@@ -3461,13 +3461,13 @@
           <a:noFill/>
         </p:spPr>
         <p:txBody>
-          <a:bodyPr wrap="square" tIns="25400" bIns="0" lIns="0">
+          <a:bodyPr wrap="square">
             <a:spAutoFit/>
           </a:bodyPr>
           <a:lstStyle/>
           <a:p>
             <a:pPr>
-              <a:defRPr sz="800">
+              <a:defRPr sz="1000">
                 <a:solidFill>
                   <a:srgbClr val="CCCCCC"/>
                 </a:solidFill>
@@ -3475,7 +3475,7 @@
               </a:defRPr>
             </a:pPr>
             <a:r>
-              <a:t>Using a Lambda layer, you can access additional code and content. It is not suitable for code update</a:t>
+              <a:t>Using a Lambda layer, you can access additional code and content. It is not suitable for code updates. Additionally, a L</a:t>
             </a:r>
           </a:p>
         </p:txBody>
@@ -3488,8 +3488,8 @@
         </p:nvSpPr>
         <p:spPr>
           <a:xfrm>
-            <a:off x="274320" y="3867911"/>
-            <a:ext cx="201168" cy="201168"/>
+            <a:off x="365760" y="3749039"/>
+            <a:ext cx="274320" cy="274320"/>
           </a:xfrm>
           <a:prstGeom prst="ellipse">
             <a:avLst/>
@@ -3520,7 +3520,7 @@
           <a:lstStyle/>
           <a:p>
             <a:pPr algn="ctr">
-              <a:defRPr sz="700" b="1">
+              <a:defRPr sz="900" b="1">
                 <a:solidFill>
                   <a:srgbClr val="FFFFFF"/>
                 </a:solidFill>
@@ -3540,8 +3540,8 @@
         </p:nvSpPr>
         <p:spPr>
           <a:xfrm>
-            <a:off x="548640" y="3822191"/>
-            <a:ext cx="6400800" cy="585215"/>
+            <a:off x="777240" y="3749039"/>
+            <a:ext cx="5943600" cy="411480"/>
           </a:xfrm>
           <a:prstGeom prst="rect">
             <a:avLst/>
@@ -3549,13 +3549,13 @@
           <a:noFill/>
         </p:spPr>
         <p:txBody>
-          <a:bodyPr wrap="square" tIns="25400" bIns="0" lIns="0">
+          <a:bodyPr wrap="square">
             <a:spAutoFit/>
           </a:bodyPr>
           <a:lstStyle/>
           <a:p>
             <a:pPr>
-              <a:defRPr sz="800">
+              <a:defRPr sz="1000">
                 <a:solidFill>
                   <a:srgbClr val="CCCCCC"/>
                 </a:solidFill>
@@ -3563,7 +3563,7 @@
               </a:defRPr>
             </a:pPr>
             <a:r>
-              <a:t>By creating separate aliases for Production and Development, systems can initiate the correct alias </a:t>
+              <a:t>By creating separate aliases for Production and Development, systems can initiate the correct alias as needed. A Lambda </a:t>
             </a:r>
           </a:p>
         </p:txBody>
@@ -3576,8 +3576,8 @@
         </p:nvSpPr>
         <p:spPr>
           <a:xfrm>
-            <a:off x="274320" y="4471416"/>
-            <a:ext cx="201168" cy="201168"/>
+            <a:off x="365760" y="4206240"/>
+            <a:ext cx="274320" cy="274320"/>
           </a:xfrm>
           <a:prstGeom prst="ellipse">
             <a:avLst/>
@@ -3608,7 +3608,7 @@
           <a:lstStyle/>
           <a:p>
             <a:pPr algn="ctr">
-              <a:defRPr sz="700" b="1">
+              <a:defRPr sz="900" b="1">
                 <a:solidFill>
                   <a:srgbClr val="FFFFFF"/>
                 </a:solidFill>
@@ -3628,8 +3628,8 @@
         </p:nvSpPr>
         <p:spPr>
           <a:xfrm>
-            <a:off x="548640" y="4425696"/>
-            <a:ext cx="6400800" cy="585215"/>
+            <a:off x="777240" y="4206240"/>
+            <a:ext cx="5943600" cy="411480"/>
           </a:xfrm>
           <a:prstGeom prst="rect">
             <a:avLst/>
@@ -3637,13 +3637,13 @@
           <a:noFill/>
         </p:spPr>
         <p:txBody>
-          <a:bodyPr wrap="square" tIns="25400" bIns="0" lIns="0">
+          <a:bodyPr wrap="square">
             <a:spAutoFit/>
           </a:bodyPr>
           <a:lstStyle/>
           <a:p>
             <a:pPr>
-              <a:defRPr sz="800">
+              <a:defRPr sz="1000">
                 <a:solidFill>
                   <a:srgbClr val="CCCCCC"/>
                 </a:solidFill>
@@ -3651,7 +3651,7 @@
               </a:defRPr>
             </a:pPr>
             <a:r>
-              <a:t>A Lambda function alias can only point to an unqualified function ARN. LAMBDA_TASK_ROOT is a variabl</a:t>
+              <a:t>A Lambda function alias can only point to an unqualified function ARN. LAMBDA_TASK_ROOT is a variable used by Lambda to </a:t>
             </a:r>
           </a:p>
         </p:txBody>
@@ -3933,8 +3933,8 @@
         </p:blipFill>
         <p:spPr>
           <a:xfrm>
-            <a:off x="182880" y="1232666"/>
-            <a:ext cx="5303520" cy="3203947"/>
+            <a:off x="182880" y="1250131"/>
+            <a:ext cx="5303520" cy="3169016"/>
           </a:xfrm>
           <a:prstGeom prst="rect">
             <a:avLst/>
@@ -4069,9 +4069,9 @@
           <a:p>
             <a:pPr>
               <a:spcAft>
-                <a:spcPts val="400"/>
+                <a:spcPts val="600"/>
               </a:spcAft>
-              <a:defRPr sz="800">
+              <a:defRPr sz="900">
                 <a:solidFill>
                   <a:srgbClr val="212121"/>
                 </a:solidFill>
@@ -4079,15 +4079,15 @@
               </a:defRPr>
             </a:pPr>
             <a:r>
-              <a:t>• Using a Lambda layer, you can access additional code and content</a:t>
+              <a:t>• Using a Lambda layer, you can access additional code and content.</a:t>
             </a:r>
           </a:p>
           <a:p>
             <a:pPr>
               <a:spcAft>
-                <a:spcPts val="400"/>
+                <a:spcPts val="600"/>
               </a:spcAft>
-              <a:defRPr sz="800">
+              <a:defRPr sz="900">
                 <a:solidFill>
                   <a:srgbClr val="212121"/>
                 </a:solidFill>
@@ -4095,7 +4095,7 @@
               </a:defRPr>
             </a:pPr>
             <a:r>
-              <a:t>• It is not suitable for code updates</a:t>
+              <a:t>• It is not suitable for code updates.</a:t>
             </a:r>
           </a:p>
         </p:txBody>
@@ -4274,8 +4274,8 @@
         </p:blipFill>
         <p:spPr>
           <a:xfrm>
-            <a:off x="182880" y="914400"/>
-            <a:ext cx="3682447" cy="3840480"/>
+            <a:off x="182880" y="949245"/>
+            <a:ext cx="5303520" cy="3770789"/>
           </a:xfrm>
           <a:prstGeom prst="rect">
             <a:avLst/>
@@ -4410,9 +4410,9 @@
           <a:p>
             <a:pPr>
               <a:spcAft>
-                <a:spcPts val="400"/>
+                <a:spcPts val="600"/>
               </a:spcAft>
-              <a:defRPr sz="800">
+              <a:defRPr sz="900">
                 <a:solidFill>
                   <a:srgbClr val="212121"/>
                 </a:solidFill>
@@ -4420,15 +4420,15 @@
               </a:defRPr>
             </a:pPr>
             <a:r>
-              <a:t>• Lambda function versions are designed to manage deployment of functions</a:t>
+              <a:t>• Lambda function versions are designed to manage deployment of functions.</a:t>
             </a:r>
           </a:p>
           <a:p>
             <a:pPr>
               <a:spcAft>
-                <a:spcPts val="400"/>
+                <a:spcPts val="600"/>
               </a:spcAft>
-              <a:defRPr sz="800">
+              <a:defRPr sz="900">
                 <a:solidFill>
                   <a:srgbClr val="212121"/>
                 </a:solidFill>
@@ -4436,23 +4436,7 @@
               </a:defRPr>
             </a:pPr>
             <a:r>
-              <a:t>• They can be used for code changes</a:t>
-            </a:r>
-          </a:p>
-          <a:p>
-            <a:pPr>
-              <a:spcAft>
-                <a:spcPts val="400"/>
-              </a:spcAft>
-              <a:defRPr sz="800">
-                <a:solidFill>
-                  <a:srgbClr val="212121"/>
-                </a:solidFill>
-                <a:latin typeface="Segoe UI"/>
-              </a:defRPr>
-            </a:pPr>
-            <a:r>
-              <a:t>• Without affecting the stable production version of the code</a:t>
+              <a:t>• They can be used for code changes, without affecting the stable production version of the code.</a:t>
             </a:r>
           </a:p>
         </p:txBody>
@@ -4631,8 +4615,8 @@
         </p:blipFill>
         <p:spPr>
           <a:xfrm>
-            <a:off x="182880" y="1287963"/>
-            <a:ext cx="5303520" cy="3093353"/>
+            <a:off x="182880" y="1107248"/>
+            <a:ext cx="5303520" cy="3454782"/>
           </a:xfrm>
           <a:prstGeom prst="rect">
             <a:avLst/>
@@ -4767,9 +4751,9 @@
           <a:p>
             <a:pPr>
               <a:spcAft>
-                <a:spcPts val="400"/>
+                <a:spcPts val="600"/>
               </a:spcAft>
-              <a:defRPr sz="800">
+              <a:defRPr sz="900">
                 <a:solidFill>
                   <a:srgbClr val="212121"/>
                 </a:solidFill>
@@ -4777,15 +4761,15 @@
               </a:defRPr>
             </a:pPr>
             <a:r>
-              <a:t>• Using a Lambda layer, you can access additional code and content</a:t>
+              <a:t>• Using a Lambda layer, you can access additional code and content.</a:t>
             </a:r>
           </a:p>
           <a:p>
             <a:pPr>
               <a:spcAft>
-                <a:spcPts val="400"/>
+                <a:spcPts val="600"/>
               </a:spcAft>
-              <a:defRPr sz="800">
+              <a:defRPr sz="900">
                 <a:solidFill>
                   <a:srgbClr val="212121"/>
                 </a:solidFill>
@@ -4793,15 +4777,15 @@
               </a:defRPr>
             </a:pPr>
             <a:r>
-              <a:t>• It is not suitable for code updates</a:t>
+              <a:t>• It is not suitable for code updates.</a:t>
             </a:r>
           </a:p>
           <a:p>
             <a:pPr>
               <a:spcAft>
-                <a:spcPts val="400"/>
+                <a:spcPts val="600"/>
               </a:spcAft>
-              <a:defRPr sz="800">
+              <a:defRPr sz="900">
                 <a:solidFill>
                   <a:srgbClr val="212121"/>
                 </a:solidFill>
@@ -4809,7 +4793,7 @@
               </a:defRPr>
             </a:pPr>
             <a:r>
-              <a:t>• Additionally, a Lambda function alias points to a Lambda function version</a:t>
+              <a:t>• Additionally, a Lambda function alias points to a Lambda function version.</a:t>
             </a:r>
           </a:p>
         </p:txBody>
@@ -4989,7 +4973,7 @@
         <p:spPr>
           <a:xfrm>
             <a:off x="182880" y="914400"/>
-            <a:ext cx="3539324" cy="3840480"/>
+            <a:ext cx="3222957" cy="3840480"/>
           </a:xfrm>
           <a:prstGeom prst="rect">
             <a:avLst/>
@@ -5124,9 +5108,9 @@
           <a:p>
             <a:pPr>
               <a:spcAft>
-                <a:spcPts val="400"/>
+                <a:spcPts val="600"/>
               </a:spcAft>
-              <a:defRPr sz="800">
+              <a:defRPr sz="900">
                 <a:solidFill>
                   <a:srgbClr val="212121"/>
                 </a:solidFill>
@@ -5134,15 +5118,15 @@
               </a:defRPr>
             </a:pPr>
             <a:r>
-              <a:t>• By creating separate aliases for Production and Development</a:t>
+              <a:t>• By creating separate aliases for Production and Development, systems can initiate the correct alias as needed.</a:t>
             </a:r>
           </a:p>
           <a:p>
             <a:pPr>
               <a:spcAft>
-                <a:spcPts val="400"/>
+                <a:spcPts val="600"/>
               </a:spcAft>
-              <a:defRPr sz="800">
+              <a:defRPr sz="900">
                 <a:solidFill>
                   <a:srgbClr val="212121"/>
                 </a:solidFill>
@@ -5150,15 +5134,15 @@
               </a:defRPr>
             </a:pPr>
             <a:r>
-              <a:t>• Systems can initiate the correct alias as needed</a:t>
+              <a:t>• A Lambda function alias can be used to point to a specific Lambda function version.</a:t>
             </a:r>
           </a:p>
           <a:p>
             <a:pPr>
               <a:spcAft>
-                <a:spcPts val="400"/>
+                <a:spcPts val="600"/>
               </a:spcAft>
-              <a:defRPr sz="800">
+              <a:defRPr sz="900">
                 <a:solidFill>
                   <a:srgbClr val="212121"/>
                 </a:solidFill>
@@ -5166,15 +5150,15 @@
               </a:defRPr>
             </a:pPr>
             <a:r>
-              <a:t>• A Lambda function alias can be used to point to a specific Lambda function version</a:t>
+              <a:t>• Using the functionality to update an alias and its linked version, the development team can update the required version as needed.</a:t>
             </a:r>
           </a:p>
           <a:p>
             <a:pPr>
               <a:spcAft>
-                <a:spcPts val="400"/>
+                <a:spcPts val="600"/>
               </a:spcAft>
-              <a:defRPr sz="800">
+              <a:defRPr sz="900">
                 <a:solidFill>
                   <a:srgbClr val="212121"/>
                 </a:solidFill>
@@ -5182,39 +5166,7 @@
               </a:defRPr>
             </a:pPr>
             <a:r>
-              <a:t>• Using the functionality to update an alias and its linked version</a:t>
-            </a:r>
-          </a:p>
-          <a:p>
-            <a:pPr>
-              <a:spcAft>
-                <a:spcPts val="400"/>
-              </a:spcAft>
-              <a:defRPr sz="800">
-                <a:solidFill>
-                  <a:srgbClr val="212121"/>
-                </a:solidFill>
-                <a:latin typeface="Segoe UI"/>
-              </a:defRPr>
-            </a:pPr>
-            <a:r>
-              <a:t>• The development team can update the required version as needed</a:t>
-            </a:r>
-          </a:p>
-          <a:p>
-            <a:pPr>
-              <a:spcAft>
-                <a:spcPts val="400"/>
-              </a:spcAft>
-              <a:defRPr sz="800">
-                <a:solidFill>
-                  <a:srgbClr val="212121"/>
-                </a:solidFill>
-                <a:latin typeface="Segoe UI"/>
-              </a:defRPr>
-            </a:pPr>
-            <a:r>
-              <a:t>• The $LATEST version is the newest published version</a:t>
+              <a:t>• The $LATEST version is the newest published version.</a:t>
             </a:r>
           </a:p>
         </p:txBody>
@@ -5393,8 +5345,8 @@
         </p:blipFill>
         <p:spPr>
           <a:xfrm>
-            <a:off x="182880" y="1760705"/>
-            <a:ext cx="5303520" cy="2147869"/>
+            <a:off x="182880" y="1110666"/>
+            <a:ext cx="5303520" cy="3447946"/>
           </a:xfrm>
           <a:prstGeom prst="rect">
             <a:avLst/>
@@ -5529,9 +5481,9 @@
           <a:p>
             <a:pPr>
               <a:spcAft>
-                <a:spcPts val="400"/>
+                <a:spcPts val="600"/>
               </a:spcAft>
-              <a:defRPr sz="800">
+              <a:defRPr sz="900">
                 <a:solidFill>
                   <a:srgbClr val="212121"/>
                 </a:solidFill>
@@ -5539,15 +5491,15 @@
               </a:defRPr>
             </a:pPr>
             <a:r>
-              <a:t>• A Lambda function alias can only point to an unqualified function ARN</a:t>
+              <a:t>• A Lambda function alias can only point to an unqualified function ARN.</a:t>
             </a:r>
           </a:p>
           <a:p>
             <a:pPr>
               <a:spcAft>
-                <a:spcPts val="400"/>
+                <a:spcPts val="600"/>
               </a:spcAft>
-              <a:defRPr sz="800">
+              <a:defRPr sz="900">
                 <a:solidFill>
                   <a:srgbClr val="212121"/>
                 </a:solidFill>
@@ -5555,15 +5507,15 @@
               </a:defRPr>
             </a:pPr>
             <a:r>
-              <a:t>• LAMBDA_TASK_ROOT is a variable used by Lambda to record the path to the code</a:t>
+              <a:t>• LAMBDA_TASK_ROOT is a variable used by Lambda to record the path to the code.</a:t>
             </a:r>
           </a:p>
           <a:p>
             <a:pPr>
               <a:spcAft>
-                <a:spcPts val="400"/>
+                <a:spcPts val="600"/>
               </a:spcAft>
-              <a:defRPr sz="800">
+              <a:defRPr sz="900">
                 <a:solidFill>
                   <a:srgbClr val="212121"/>
                 </a:solidFill>
@@ -5571,7 +5523,7 @@
               </a:defRPr>
             </a:pPr>
             <a:r>
-              <a:t>• However, it cannot be used in the way the response describes</a:t>
+              <a:t>• However, it cannot be used in the way the response describes.</a:t>
             </a:r>
           </a:p>
         </p:txBody>
